--- a/docs/Nashr_Pitch_Deck.pptx
+++ b/docs/Nashr_Pitch_Deck.pptx
@@ -3237,7 +3237,7 @@
                 </a:solidFill>
                 <a:latin typeface="Avenir Next"/>
               </a:rPr>
-              <a:t>The autonomous AI marketing agent for Gulf businesses — Arabic-first, WhatsApp-native, hosted in-Kingdom.</a:t>
+              <a:t>The AI marketing team for Gulf businesses, Arabic-first: it drafts, you approve.</a:t>
             </a:r>
           </a:p>
         </p:txBody>
@@ -31024,7 +31024,7 @@
                 </a:solidFill>
                 <a:latin typeface="Avenir Next"/>
               </a:rPr>
-              <a:t>hello@nashr.ai  ·  nashr.ai</a:t>
+              <a:t>hello@thakeen.com  ·  thakeen.com</a:t>
             </a:r>
           </a:p>
         </p:txBody>
@@ -35137,7 +35137,7 @@
         <p:spPr>
           <a:xfrm>
             <a:off x="731520" y="2377440"/>
-            <a:ext cx="5669280" cy="3657600"/>
+            <a:ext cx="10698480" cy="3657600"/>
           </a:xfrm>
           <a:prstGeom prst="rect">
             <a:avLst/>
@@ -35227,166 +35227,6 @@
                 <a:latin typeface="Avenir Next"/>
               </a:rPr>
               <a:t>•  Global AI tools are English-first, non-agentic, and blind to Gulf channels, payments, and calendar.</a:t>
-            </a:r>
-          </a:p>
-        </p:txBody>
-      </p:sp>
-      <p:sp>
-        <p:nvSpPr>
-          <p:cNvPr id="98" name="Rounded Rectangle 97"/>
-          <p:cNvSpPr/>
-          <p:nvPr/>
-        </p:nvSpPr>
-        <p:spPr>
-          <a:xfrm>
-            <a:off x="6949440" y="2377440"/>
-            <a:ext cx="4480560" cy="3291840"/>
-          </a:xfrm>
-          <a:prstGeom prst="roundRect">
-            <a:avLst/>
-          </a:prstGeom>
-          <a:solidFill>
-            <a:srgbClr val="0F3D3A"/>
-          </a:solidFill>
-          <a:ln>
-            <a:noFill/>
-          </a:ln>
-        </p:spPr>
-        <p:style>
-          <a:lnRef idx="1">
-            <a:schemeClr val="accent1"/>
-          </a:lnRef>
-          <a:fillRef idx="3">
-            <a:schemeClr val="accent1"/>
-          </a:fillRef>
-          <a:effectRef idx="2">
-            <a:schemeClr val="accent1"/>
-          </a:effectRef>
-          <a:fontRef idx="minor">
-            <a:schemeClr val="lt1"/>
-          </a:fontRef>
-        </p:style>
-        <p:txBody>
-          <a:bodyPr rtlCol="0" anchor="ctr"/>
-          <a:lstStyle/>
-          <a:p>
-            <a:pPr algn="ctr"/>
-          </a:p>
-        </p:txBody>
-      </p:sp>
-      <p:sp>
-        <p:nvSpPr>
-          <p:cNvPr id="99" name="TextBox 98"/>
-          <p:cNvSpPr txBox="1"/>
-          <p:nvPr/>
-        </p:nvSpPr>
-        <p:spPr>
-          <a:xfrm>
-            <a:off x="7223760" y="2560320"/>
-            <a:ext cx="4023360" cy="457200"/>
-          </a:xfrm>
-          <a:prstGeom prst="rect">
-            <a:avLst/>
-          </a:prstGeom>
-          <a:noFill/>
-        </p:spPr>
-        <p:txBody>
-          <a:bodyPr wrap="square">
-            <a:spAutoFit/>
-          </a:bodyPr>
-          <a:lstStyle/>
-          <a:p>
-            <a:pPr algn="l">
-              <a:spcAft>
-                <a:spcPts val="600"/>
-              </a:spcAft>
-            </a:pPr>
-            <a:r>
-              <a:rPr sz="1200" b="1">
-                <a:solidFill>
-                  <a:srgbClr val="F2B33D"/>
-                </a:solidFill>
-                <a:latin typeface="Avenir Next"/>
-              </a:rPr>
-              <a:t>What a merchant told us</a:t>
-            </a:r>
-          </a:p>
-        </p:txBody>
-      </p:sp>
-      <p:sp>
-        <p:nvSpPr>
-          <p:cNvPr id="100" name="TextBox 99"/>
-          <p:cNvSpPr txBox="1"/>
-          <p:nvPr/>
-        </p:nvSpPr>
-        <p:spPr>
-          <a:xfrm>
-            <a:off x="7223760" y="3017520"/>
-            <a:ext cx="4023360" cy="2560320"/>
-          </a:xfrm>
-          <a:prstGeom prst="rect">
-            <a:avLst/>
-          </a:prstGeom>
-          <a:noFill/>
-        </p:spPr>
-        <p:txBody>
-          <a:bodyPr wrap="square">
-            <a:spAutoFit/>
-          </a:bodyPr>
-          <a:lstStyle/>
-          <a:p>
-            <a:pPr algn="l">
-              <a:spcAft>
-                <a:spcPts val="600"/>
-              </a:spcAft>
-            </a:pPr>
-            <a:r>
-              <a:rPr sz="1800" b="0">
-                <a:solidFill>
-                  <a:srgbClr val="E9F0EC"/>
-                </a:solidFill>
-                <a:latin typeface="Avenir Next"/>
-              </a:rPr>
-              <a:t>“I spend SAR 25k a month on Snap and I have no idea if it works. I post when I remember. Ramadan came and I had nothing ready.”</a:t>
-            </a:r>
-          </a:p>
-        </p:txBody>
-      </p:sp>
-      <p:sp>
-        <p:nvSpPr>
-          <p:cNvPr id="101" name="TextBox 100"/>
-          <p:cNvSpPr txBox="1"/>
-          <p:nvPr/>
-        </p:nvSpPr>
-        <p:spPr>
-          <a:xfrm>
-            <a:off x="7223760" y="5120640"/>
-            <a:ext cx="4023360" cy="457200"/>
-          </a:xfrm>
-          <a:prstGeom prst="rect">
-            <a:avLst/>
-          </a:prstGeom>
-          <a:noFill/>
-        </p:spPr>
-        <p:txBody>
-          <a:bodyPr wrap="square">
-            <a:spAutoFit/>
-          </a:bodyPr>
-          <a:lstStyle/>
-          <a:p>
-            <a:pPr algn="l">
-              <a:spcAft>
-                <a:spcPts val="600"/>
-              </a:spcAft>
-            </a:pPr>
-            <a:r>
-              <a:rPr sz="1100" b="0">
-                <a:solidFill>
-                  <a:srgbClr val="A9BFB8"/>
-                </a:solidFill>
-                <a:latin typeface="Avenir Next"/>
-              </a:rPr>
-              <a:t>— Perfume store, Riyadh, SAR 1.8M GMV</a:t>
             </a:r>
           </a:p>
         </p:txBody>
@@ -40194,7 +40034,7 @@
                 </a:solidFill>
                 <a:latin typeface="Avenir Next"/>
               </a:rPr>
-              <a:t>A night with Noor</a:t>
+              <a:t>A week with Noor</a:t>
             </a:r>
           </a:p>
         </p:txBody>
@@ -44204,7 +44044,7 @@
         </p:nvGraphicFramePr>
         <p:xfrm>
           <a:off x="731520" y="2286000"/>
-          <a:ext cx="10698479" cy="2560320"/>
+          <a:ext cx="10698480" cy="1828800"/>
         </p:xfrm>
         <a:graphic>
           <a:graphicData uri="http://schemas.openxmlformats.org/drawingml/2006/table">
@@ -44213,8 +44053,8 @@
                 <a:tableStyleId>{5C22544A-7EE6-4342-B048-85BDC9FD1C3A}</a:tableStyleId>
               </a:tblPr>
               <a:tblGrid>
-                <a:gridCol w="1005840"/>
-                <a:gridCol w="7498079"/>
+                <a:gridCol w="2194560"/>
+                <a:gridCol w="6309360"/>
                 <a:gridCol w="2194560"/>
               </a:tblGrid>
               <a:tr h="365760">
@@ -44230,7 +44070,7 @@
                           </a:solidFill>
                           <a:latin typeface="Avenir Next"/>
                         </a:rPr>
-                        <a:t>Time</a:t>
+                        <a:t>When</a:t>
                       </a:r>
                     </a:p>
                   </a:txBody>
@@ -44252,7 +44092,7 @@
                           </a:solidFill>
                           <a:latin typeface="Avenir Next"/>
                         </a:rPr>
-                        <a:t>Action</a:t>
+                        <a:t>What happens</a:t>
                       </a:r>
                     </a:p>
                   </a:txBody>
@@ -44298,7 +44138,7 @@
                           </a:solidFill>
                           <a:latin typeface="Avenir Next"/>
                         </a:rPr>
-                        <a:t>23:40</a:t>
+                        <a:t>Sunday morning</a:t>
                       </a:r>
                     </a:p>
                   </a:txBody>
@@ -44320,7 +44160,7 @@
                           </a:solidFill>
                           <a:latin typeface="Avenir Next"/>
                         </a:rPr>
-                        <a:t>Snap campaign ROAS fell to 1.8 → cut 30%, moved budget to TikTok</a:t>
+                        <a:t>Drafts the brand's weekly plan</a:t>
                       </a:r>
                     </a:p>
                   </a:txBody>
@@ -44342,7 +44182,7 @@
                           </a:solidFill>
                           <a:latin typeface="Avenir Next"/>
                         </a:rPr>
-                        <a:t>Sultan · Ads</a:t>
+                        <a:t>Noor</a:t>
                       </a:r>
                     </a:p>
                   </a:txBody>
@@ -44366,7 +44206,7 @@
                           </a:solidFill>
                           <a:latin typeface="Avenir Next"/>
                         </a:rPr>
-                        <a:t>01:15</a:t>
+                        <a:t>When you ask</a:t>
                       </a:r>
                     </a:p>
                   </a:txBody>
@@ -44388,143 +44228,7 @@
                           </a:solidFill>
                           <a:latin typeface="Avenir Next"/>
                         </a:rPr>
-                        <a:t>Wrote 1,800-word Arabic article on a keyword competitors miss</a:t>
-                      </a:r>
-                    </a:p>
-                  </a:txBody>
-                  <a:tcPr>
-                    <a:solidFill>
-                      <a:srgbClr val="EBE7DC"/>
-                    </a:solidFill>
-                  </a:tcPr>
-                </a:tc>
-                <a:tc>
-                  <a:txBody>
-                    <a:bodyPr/>
-                    <a:lstStyle/>
-                    <a:p>
-                      <a:r>
-                        <a:rPr sz="1300" b="0">
-                          <a:solidFill>
-                            <a:srgbClr val="101418"/>
-                          </a:solidFill>
-                          <a:latin typeface="Avenir Next"/>
-                        </a:rPr>
-                        <a:t>Faisal · SEO/GEO</a:t>
-                      </a:r>
-                    </a:p>
-                  </a:txBody>
-                  <a:tcPr>
-                    <a:solidFill>
-                      <a:srgbClr val="EBE7DC"/>
-                    </a:solidFill>
-                  </a:tcPr>
-                </a:tc>
-              </a:tr>
-              <a:tr h="365760">
-                <a:tc>
-                  <a:txBody>
-                    <a:bodyPr/>
-                    <a:lstStyle/>
-                    <a:p>
-                      <a:r>
-                        <a:rPr sz="1300" b="0">
-                          <a:solidFill>
-                            <a:srgbClr val="101418"/>
-                          </a:solidFill>
-                          <a:latin typeface="Avenir Next"/>
-                        </a:rPr>
-                        <a:t>02:50</a:t>
-                      </a:r>
-                    </a:p>
-                  </a:txBody>
-                  <a:tcPr>
-                    <a:solidFill>
-                      <a:srgbClr val="F6F4EE"/>
-                    </a:solidFill>
-                  </a:tcPr>
-                </a:tc>
-                <a:tc>
-                  <a:txBody>
-                    <a:bodyPr/>
-                    <a:lstStyle/>
-                    <a:p>
-                      <a:r>
-                        <a:rPr sz="1300" b="0">
-                          <a:solidFill>
-                            <a:srgbClr val="101418"/>
-                          </a:solidFill>
-                          <a:latin typeface="Avenir Next"/>
-                        </a:rPr>
-                        <a:t>12 posts for next week in light Saudi dialect + 3 UGC scripts</a:t>
-                      </a:r>
-                    </a:p>
-                  </a:txBody>
-                  <a:tcPr>
-                    <a:solidFill>
-                      <a:srgbClr val="F6F4EE"/>
-                    </a:solidFill>
-                  </a:tcPr>
-                </a:tc>
-                <a:tc>
-                  <a:txBody>
-                    <a:bodyPr/>
-                    <a:lstStyle/>
-                    <a:p>
-                      <a:r>
-                        <a:rPr sz="1300" b="0">
-                          <a:solidFill>
-                            <a:srgbClr val="101418"/>
-                          </a:solidFill>
-                          <a:latin typeface="Avenir Next"/>
-                        </a:rPr>
-                        <a:t>Lama · Social</a:t>
-                      </a:r>
-                    </a:p>
-                  </a:txBody>
-                  <a:tcPr>
-                    <a:solidFill>
-                      <a:srgbClr val="F6F4EE"/>
-                    </a:solidFill>
-                  </a:tcPr>
-                </a:tc>
-              </a:tr>
-              <a:tr h="365760">
-                <a:tc>
-                  <a:txBody>
-                    <a:bodyPr/>
-                    <a:lstStyle/>
-                    <a:p>
-                      <a:r>
-                        <a:rPr sz="1300" b="0">
-                          <a:solidFill>
-                            <a:srgbClr val="101418"/>
-                          </a:solidFill>
-                          <a:latin typeface="Avenir Next"/>
-                        </a:rPr>
-                        <a:t>04:30</a:t>
-                      </a:r>
-                    </a:p>
-                  </a:txBody>
-                  <a:tcPr>
-                    <a:solidFill>
-                      <a:srgbClr val="EBE7DC"/>
-                    </a:solidFill>
-                  </a:tcPr>
-                </a:tc>
-                <a:tc>
-                  <a:txBody>
-                    <a:bodyPr/>
-                    <a:lstStyle/>
-                    <a:p>
-                      <a:r>
-                        <a:rPr sz="1300" b="0">
-                          <a:solidFill>
-                            <a:srgbClr val="101418"/>
-                          </a:solidFill>
-                          <a:latin typeface="Avenir Next"/>
-                        </a:rPr>
-                        <a:t>Competitor changed 6 prices → comparison added to brief</a:t>
+                        <a:t>Posts, articles, WhatsApp messages and ad copy in the brand's voice</a:t>
                       </a:r>
                     </a:p>
                   </a:txBody>
@@ -44570,7 +44274,7 @@
                           </a:solidFill>
                           <a:latin typeface="Avenir Next"/>
                         </a:rPr>
-                        <a:t>06:00</a:t>
+                        <a:t>When you ask</a:t>
                       </a:r>
                     </a:p>
                   </a:txBody>
@@ -44592,7 +44296,7 @@
                           </a:solidFill>
                           <a:latin typeface="Avenir Next"/>
                         </a:rPr>
-                        <a:t>Abandoned-cart WhatsApp to 214 customers (expected 8–12% conversion)</a:t>
+                        <a:t>Pricing review, customer follow-up sequences, reports</a:t>
                       </a:r>
                     </a:p>
                   </a:txBody>
@@ -44614,7 +44318,7 @@
                           </a:solidFill>
                           <a:latin typeface="Avenir Next"/>
                         </a:rPr>
-                        <a:t>Reem · WhatsApp</a:t>
+                        <a:t>Razan · Sami · Dana</a:t>
                       </a:r>
                     </a:p>
                   </a:txBody>
@@ -44638,7 +44342,7 @@
                           </a:solidFill>
                           <a:latin typeface="Avenir Next"/>
                         </a:rPr>
-                        <a:t>08:00</a:t>
+                        <a:t>Every day, 08:00 KSA</a:t>
                       </a:r>
                     </a:p>
                   </a:txBody>
@@ -44660,7 +44364,7 @@
                           </a:solidFill>
                           <a:latin typeface="Avenir Next"/>
                         </a:rPr>
-                        <a:t>Morning brief sent: 4 approvals pending, revenue SAR 18,420 (+11%)</a:t>
+                        <a:t>Morning brief in the app: what waits for approval, credits, seasons ahead</a:t>
                       </a:r>
                     </a:p>
                   </a:txBody>
@@ -44731,7 +44435,7 @@
                 </a:solidFill>
                 <a:latin typeface="Avenir Next"/>
               </a:rPr>
-              <a:t>Default: everything waits for approval. Trust builds → delegate by type. Acceptance rate reaches 95% by week 8.</a:t>
+              <a:t>An illustrative example, not a real account. Nothing is published before you approve it.</a:t>
             </a:r>
           </a:p>
         </p:txBody>
@@ -49025,7 +48729,7 @@
                 </a:solidFill>
                 <a:latin typeface="Avenir Next"/>
               </a:rPr>
-              <a:t>PDPL</a:t>
+              <a:t>$39→</a:t>
             </a:r>
           </a:p>
         </p:txBody>
@@ -49039,84 +48743,6 @@
         <p:spPr>
           <a:xfrm>
             <a:off x="6400800" y="3063240"/>
-            <a:ext cx="2651760" cy="731520"/>
-          </a:xfrm>
-          <a:prstGeom prst="rect">
-            <a:avLst/>
-          </a:prstGeom>
-          <a:noFill/>
-        </p:spPr>
-        <p:txBody>
-          <a:bodyPr wrap="square">
-            <a:spAutoFit/>
-          </a:bodyPr>
-          <a:lstStyle/>
-          <a:p>
-            <a:pPr algn="l">
-              <a:spcAft>
-                <a:spcPts val="600"/>
-              </a:spcAft>
-            </a:pPr>
-            <a:r>
-              <a:rPr sz="1300" b="0">
-                <a:solidFill>
-                  <a:srgbClr val="A9BFB8"/>
-                </a:solidFill>
-                <a:latin typeface="Avenir Next"/>
-              </a:rPr>
-              <a:t>In-Kingdom data rules now enforced — global tools can't comply cheaply</a:t>
-            </a:r>
-          </a:p>
-        </p:txBody>
-      </p:sp>
-      <p:sp>
-        <p:nvSpPr>
-          <p:cNvPr id="103" name="TextBox 102"/>
-          <p:cNvSpPr txBox="1"/>
-          <p:nvPr/>
-        </p:nvSpPr>
-        <p:spPr>
-          <a:xfrm>
-            <a:off x="9235440" y="2286000"/>
-            <a:ext cx="2651760" cy="822960"/>
-          </a:xfrm>
-          <a:prstGeom prst="rect">
-            <a:avLst/>
-          </a:prstGeom>
-          <a:noFill/>
-        </p:spPr>
-        <p:txBody>
-          <a:bodyPr wrap="square">
-            <a:spAutoFit/>
-          </a:bodyPr>
-          <a:lstStyle/>
-          <a:p>
-            <a:pPr algn="l">
-              <a:spcAft>
-                <a:spcPts val="600"/>
-              </a:spcAft>
-            </a:pPr>
-            <a:r>
-              <a:rPr sz="4000" b="1">
-                <a:solidFill>
-                  <a:srgbClr val="F2B33D"/>
-                </a:solidFill>
-                <a:latin typeface="Avenir Next"/>
-              </a:rPr>
-              <a:t>$39→</a:t>
-            </a:r>
-          </a:p>
-        </p:txBody>
-      </p:sp>
-      <p:sp>
-        <p:nvSpPr>
-          <p:cNvPr id="104" name="TextBox 103"/>
-          <p:cNvSpPr txBox="1"/>
-          <p:nvPr/>
-        </p:nvSpPr>
-        <p:spPr>
-          <a:xfrm>
-            <a:off x="9235440" y="3063240"/>
             <a:ext cx="2651760" cy="731520"/>
           </a:xfrm>
           <a:prstGeom prst="rect">
@@ -49149,7 +48775,7 @@
       </p:sp>
       <p:sp>
         <p:nvSpPr>
-          <p:cNvPr id="105" name="TextBox 104"/>
+          <p:cNvPr id="103" name="TextBox 102"/>
           <p:cNvSpPr txBox="1"/>
           <p:nvPr/>
         </p:nvSpPr>
@@ -57693,10 +57319,10 @@
               </a:tblPr>
               <a:tblGrid>
                 <a:gridCol w="1463040"/>
+                <a:gridCol w="2194560"/>
+                <a:gridCol w="2011680"/>
                 <a:gridCol w="1828800"/>
-                <a:gridCol w="2011680"/>
-                <a:gridCol w="3566160"/>
-                <a:gridCol w="1828800"/>
+                <a:gridCol w="3200400"/>
               </a:tblGrid>
               <a:tr h="365760">
                 <a:tc>
@@ -57733,7 +57359,7 @@
                           </a:solidFill>
                           <a:latin typeface="Avenir Next"/>
                         </a:rPr>
-                        <a:t>SAR / month</a:t>
+                        <a:t>SAR / month + VAT</a:t>
                       </a:r>
                     </a:p>
                   </a:txBody>
@@ -57755,7 +57381,29 @@
                           </a:solidFill>
                           <a:latin typeface="Avenir Next"/>
                         </a:rPr>
-                        <a:t>Credits</a:t>
+                        <a:t>Credits / month</a:t>
+                      </a:r>
+                    </a:p>
+                  </a:txBody>
+                  <a:tcPr>
+                    <a:solidFill>
+                      <a:srgbClr val="0F3D3A"/>
+                    </a:solidFill>
+                  </a:tcPr>
+                </a:tc>
+                <a:tc>
+                  <a:txBody>
+                    <a:bodyPr/>
+                    <a:lstStyle/>
+                    <a:p>
+                      <a:r>
+                        <a:rPr sz="1300" b="1">
+                          <a:solidFill>
+                            <a:srgbClr val="E9F0EC"/>
+                          </a:solidFill>
+                          <a:latin typeface="Avenir Next"/>
+                        </a:rPr>
+                        <a:t>Seats</a:t>
                       </a:r>
                     </a:p>
                   </a:txBody>
@@ -57778,28 +57426,6 @@
                           <a:latin typeface="Avenir Next"/>
                         </a:rPr>
                         <a:t>For</a:t>
-                      </a:r>
-                    </a:p>
-                  </a:txBody>
-                  <a:tcPr>
-                    <a:solidFill>
-                      <a:srgbClr val="0F3D3A"/>
-                    </a:solidFill>
-                  </a:tcPr>
-                </a:tc>
-                <a:tc>
-                  <a:txBody>
-                    <a:bodyPr/>
-                    <a:lstStyle/>
-                    <a:p>
-                      <a:r>
-                        <a:rPr sz="1300" b="1">
-                          <a:solidFill>
-                            <a:srgbClr val="E9F0EC"/>
-                          </a:solidFill>
-                          <a:latin typeface="Avenir Next"/>
-                        </a:rPr>
-                        <a:t>Gross margin</a:t>
                       </a:r>
                     </a:p>
                   </a:txBody>
@@ -57845,7 +57471,7 @@
                           </a:solidFill>
                           <a:latin typeface="Avenir Next"/>
                         </a:rPr>
-                        <a:t>149</a:t>
+                        <a:t>299</a:t>
                       </a:r>
                     </a:p>
                   </a:txBody>
@@ -57867,7 +57493,29 @@
                           </a:solidFill>
                           <a:latin typeface="Avenir Next"/>
                         </a:rPr>
-                        <a:t>200</a:t>
+                        <a:t>300</a:t>
+                      </a:r>
+                    </a:p>
+                  </a:txBody>
+                  <a:tcPr>
+                    <a:solidFill>
+                      <a:srgbClr val="0A2B29"/>
+                    </a:solidFill>
+                  </a:tcPr>
+                </a:tc>
+                <a:tc>
+                  <a:txBody>
+                    <a:bodyPr/>
+                    <a:lstStyle/>
+                    <a:p>
+                      <a:r>
+                        <a:rPr sz="1300" b="0">
+                          <a:solidFill>
+                            <a:srgbClr val="E9F0EC"/>
+                          </a:solidFill>
+                          <a:latin typeface="Avenir Next"/>
+                        </a:rPr>
+                        <a:t>1</a:t>
                       </a:r>
                     </a:p>
                   </a:txBody>
@@ -57890,28 +57538,6 @@
                           <a:latin typeface="Avenir Next"/>
                         </a:rPr>
                         <a:t>Solo sellers, creators</a:t>
-                      </a:r>
-                    </a:p>
-                  </a:txBody>
-                  <a:tcPr>
-                    <a:solidFill>
-                      <a:srgbClr val="0A2B29"/>
-                    </a:solidFill>
-                  </a:tcPr>
-                </a:tc>
-                <a:tc>
-                  <a:txBody>
-                    <a:bodyPr/>
-                    <a:lstStyle/>
-                    <a:p>
-                      <a:r>
-                        <a:rPr sz="1300" b="0">
-                          <a:solidFill>
-                            <a:srgbClr val="E9F0EC"/>
-                          </a:solidFill>
-                          <a:latin typeface="Avenir Next"/>
-                        </a:rPr>
-                        <a:t>~69%</a:t>
                       </a:r>
                     </a:p>
                   </a:txBody>
@@ -57957,7 +57583,7 @@
                           </a:solidFill>
                           <a:latin typeface="Avenir Next"/>
                         </a:rPr>
-                        <a:t>399</a:t>
+                        <a:t>499</a:t>
                       </a:r>
                     </a:p>
                   </a:txBody>
@@ -58001,7 +57627,7 @@
                           </a:solidFill>
                           <a:latin typeface="Avenir Next"/>
                         </a:rPr>
-                        <a:t>Founders, stores, clinics</a:t>
+                        <a:t>3</a:t>
                       </a:r>
                     </a:p>
                   </a:txBody>
@@ -58023,7 +57649,119 @@
                           </a:solidFill>
                           <a:latin typeface="Avenir Next"/>
                         </a:rPr>
-                        <a:t>~75%</a:t>
+                        <a:t>Founders, stores, clinics</a:t>
+                      </a:r>
+                    </a:p>
+                  </a:txBody>
+                  <a:tcPr>
+                    <a:solidFill>
+                      <a:srgbClr val="0A2B29"/>
+                    </a:solidFill>
+                  </a:tcPr>
+                </a:tc>
+              </a:tr>
+              <a:tr h="365760">
+                <a:tc>
+                  <a:txBody>
+                    <a:bodyPr/>
+                    <a:lstStyle/>
+                    <a:p>
+                      <a:r>
+                        <a:rPr sz="1300" b="0">
+                          <a:solidFill>
+                            <a:srgbClr val="E9F0EC"/>
+                          </a:solidFill>
+                          <a:latin typeface="Avenir Next"/>
+                        </a:rPr>
+                        <a:t>Business</a:t>
+                      </a:r>
+                    </a:p>
+                  </a:txBody>
+                  <a:tcPr>
+                    <a:solidFill>
+                      <a:srgbClr val="0A2B29"/>
+                    </a:solidFill>
+                  </a:tcPr>
+                </a:tc>
+                <a:tc>
+                  <a:txBody>
+                    <a:bodyPr/>
+                    <a:lstStyle/>
+                    <a:p>
+                      <a:r>
+                        <a:rPr sz="1300" b="0">
+                          <a:solidFill>
+                            <a:srgbClr val="E9F0EC"/>
+                          </a:solidFill>
+                          <a:latin typeface="Avenir Next"/>
+                        </a:rPr>
+                        <a:t>999</a:t>
+                      </a:r>
+                    </a:p>
+                  </a:txBody>
+                  <a:tcPr>
+                    <a:solidFill>
+                      <a:srgbClr val="0A2B29"/>
+                    </a:solidFill>
+                  </a:tcPr>
+                </a:tc>
+                <a:tc>
+                  <a:txBody>
+                    <a:bodyPr/>
+                    <a:lstStyle/>
+                    <a:p>
+                      <a:r>
+                        <a:rPr sz="1300" b="0">
+                          <a:solidFill>
+                            <a:srgbClr val="E9F0EC"/>
+                          </a:solidFill>
+                          <a:latin typeface="Avenir Next"/>
+                        </a:rPr>
+                        <a:t>1,500</a:t>
+                      </a:r>
+                    </a:p>
+                  </a:txBody>
+                  <a:tcPr>
+                    <a:solidFill>
+                      <a:srgbClr val="0A2B29"/>
+                    </a:solidFill>
+                  </a:tcPr>
+                </a:tc>
+                <a:tc>
+                  <a:txBody>
+                    <a:bodyPr/>
+                    <a:lstStyle/>
+                    <a:p>
+                      <a:r>
+                        <a:rPr sz="1300" b="0">
+                          <a:solidFill>
+                            <a:srgbClr val="E9F0EC"/>
+                          </a:solidFill>
+                          <a:latin typeface="Avenir Next"/>
+                        </a:rPr>
+                        <a:t>7</a:t>
+                      </a:r>
+                    </a:p>
+                  </a:txBody>
+                  <a:tcPr>
+                    <a:solidFill>
+                      <a:srgbClr val="0A2B29"/>
+                    </a:solidFill>
+                  </a:tcPr>
+                </a:tc>
+                <a:tc>
+                  <a:txBody>
+                    <a:bodyPr/>
+                    <a:lstStyle/>
+                    <a:p>
+                      <a:r>
+                        <a:rPr sz="1300" b="0">
+                          <a:solidFill>
+                            <a:srgbClr val="E9F0EC"/>
+                          </a:solidFill>
+                          <a:latin typeface="Avenir Next"/>
+                        </a:rPr>
+                        <a:t>Bigger teams and businesses</a:t>
                       </a:r>
                     </a:p>
                   </a:txBody>
@@ -58069,7 +57807,7 @@
                           </a:solidFill>
                           <a:latin typeface="Avenir Next"/>
                         </a:rPr>
-                        <a:t>799</a:t>
+                        <a:t>Contact us</a:t>
                       </a:r>
                     </a:p>
                   </a:txBody>
@@ -58091,7 +57829,7 @@
                           </a:solidFill>
                           <a:latin typeface="Avenir Next"/>
                         </a:rPr>
-                        <a:t>2,000 (roll over)</a:t>
+                        <a:t>from 1,500</a:t>
                       </a:r>
                     </a:p>
                   </a:txBody>
@@ -58113,7 +57851,7 @@
                           </a:solidFill>
                           <a:latin typeface="Avenir Next"/>
                         </a:rPr>
-                        <a:t>Agencies, multi-branch</a:t>
+                        <a:t>sized to the team</a:t>
                       </a:r>
                     </a:p>
                   </a:txBody>
@@ -58135,119 +57873,7 @@
                           </a:solidFill>
                           <a:latin typeface="Avenir Next"/>
                         </a:rPr>
-                        <a:t>~72%</a:t>
-                      </a:r>
-                    </a:p>
-                  </a:txBody>
-                  <a:tcPr>
-                    <a:solidFill>
-                      <a:srgbClr val="0A2B29"/>
-                    </a:solidFill>
-                  </a:tcPr>
-                </a:tc>
-              </a:tr>
-              <a:tr h="365760">
-                <a:tc>
-                  <a:txBody>
-                    <a:bodyPr/>
-                    <a:lstStyle/>
-                    <a:p>
-                      <a:r>
-                        <a:rPr sz="1300" b="0">
-                          <a:solidFill>
-                            <a:srgbClr val="E9F0EC"/>
-                          </a:solidFill>
-                          <a:latin typeface="Avenir Next"/>
-                        </a:rPr>
-                        <a:t>Enterprise</a:t>
-                      </a:r>
-                    </a:p>
-                  </a:txBody>
-                  <a:tcPr>
-                    <a:solidFill>
-                      <a:srgbClr val="0A2B29"/>
-                    </a:solidFill>
-                  </a:tcPr>
-                </a:tc>
-                <a:tc>
-                  <a:txBody>
-                    <a:bodyPr/>
-                    <a:lstStyle/>
-                    <a:p>
-                      <a:r>
-                        <a:rPr sz="1300" b="0">
-                          <a:solidFill>
-                            <a:srgbClr val="E9F0EC"/>
-                          </a:solidFill>
-                          <a:latin typeface="Avenir Next"/>
-                        </a:rPr>
-                        <a:t>custom (~4,500)</a:t>
-                      </a:r>
-                    </a:p>
-                  </a:txBody>
-                  <a:tcPr>
-                    <a:solidFill>
-                      <a:srgbClr val="0A2B29"/>
-                    </a:solidFill>
-                  </a:tcPr>
-                </a:tc>
-                <a:tc>
-                  <a:txBody>
-                    <a:bodyPr/>
-                    <a:lstStyle/>
-                    <a:p>
-                      <a:r>
-                        <a:rPr sz="1300" b="0">
-                          <a:solidFill>
-                            <a:srgbClr val="E9F0EC"/>
-                          </a:solidFill>
-                          <a:latin typeface="Avenir Next"/>
-                        </a:rPr>
-                        <a:t>custom</a:t>
-                      </a:r>
-                    </a:p>
-                  </a:txBody>
-                  <a:tcPr>
-                    <a:solidFill>
-                      <a:srgbClr val="0A2B29"/>
-                    </a:solidFill>
-                  </a:tcPr>
-                </a:tc>
-                <a:tc>
-                  <a:txBody>
-                    <a:bodyPr/>
-                    <a:lstStyle/>
-                    <a:p>
-                      <a:r>
-                        <a:rPr sz="1300" b="0">
-                          <a:solidFill>
-                            <a:srgbClr val="E9F0EC"/>
-                          </a:solidFill>
-                          <a:latin typeface="Avenir Next"/>
-                        </a:rPr>
-                        <a:t>Groups, real-estate developers</a:t>
-                      </a:r>
-                    </a:p>
-                  </a:txBody>
-                  <a:tcPr>
-                    <a:solidFill>
-                      <a:srgbClr val="0A2B29"/>
-                    </a:solidFill>
-                  </a:tcPr>
-                </a:tc>
-                <a:tc>
-                  <a:txBody>
-                    <a:bodyPr/>
-                    <a:lstStyle/>
-                    <a:p>
-                      <a:r>
-                        <a:rPr sz="1300" b="0">
-                          <a:solidFill>
-                            <a:srgbClr val="E9F0EC"/>
-                          </a:solidFill>
-                          <a:latin typeface="Avenir Next"/>
-                        </a:rPr>
-                        <a:t>~79%</a:t>
+                        <a:t>Agencies and large groups</a:t>
                       </a:r>
                     </a:p>
                   </a:txBody>
@@ -58296,7 +57922,7 @@
                 </a:solidFill>
                 <a:latin typeface="Avenir Next"/>
               </a:rPr>
-              <a:t>Credits meter real model + media cost (post = 1, article = 2, WhatsApp campaign = 3, video = 12–24). Top-ups and extra seats/brands add ~12% revenue.</a:t>
+              <a:t>Credits meter each task's real model and media cost; the cost of every task is on thakeen.com/pricing. Monthly credits do not roll over; paid plans can add top-up packs.</a:t>
             </a:r>
           </a:p>
           <a:p>
@@ -58312,7 +57938,7 @@
                 </a:solidFill>
                 <a:latin typeface="Avenir Next"/>
               </a:rPr>
-              <a:t>7-day trial, no card. Annual = 2 months free. Billing via Tap/Moyasar (mada, Apple Pay, STC Pay).</a:t>
+              <a:t>Free trial, no card. Prices are in SAR and exclude VAT.</a:t>
             </a:r>
           </a:p>
         </p:txBody>
@@ -62426,7 +62052,7 @@
         </p:nvGraphicFramePr>
         <p:xfrm>
           <a:off x="731520" y="2194560"/>
-          <a:ext cx="10698480" cy="2926080"/>
+          <a:ext cx="10698480" cy="2560320"/>
         </p:xfrm>
         <a:graphic>
           <a:graphicData uri="http://schemas.openxmlformats.org/drawingml/2006/table">
@@ -62860,7 +62486,7 @@
                           </a:solidFill>
                           <a:latin typeface="Avenir Next"/>
                         </a:rPr>
-                        <a:t>Data</a:t>
+                        <a:t>Payments</a:t>
                       </a:r>
                     </a:p>
                   </a:txBody>
@@ -62882,7 +62508,7 @@
                           </a:solidFill>
                           <a:latin typeface="Avenir Next"/>
                         </a:rPr>
-                        <a:t>US hosting</a:t>
+                        <a:t>Stripe</a:t>
                       </a:r>
                     </a:p>
                   </a:txBody>
@@ -62904,81 +62530,13 @@
                           </a:solidFill>
                           <a:latin typeface="Avenir Next"/>
                         </a:rPr>
-                        <a:t>KSA region, PDPL-compliant</a:t>
+                        <a:t>Tap / Moyasar, mada, Tabby/Tamara awareness</a:t>
                       </a:r>
                     </a:p>
                   </a:txBody>
                   <a:tcPr>
                     <a:solidFill>
                       <a:srgbClr val="EBE7DC"/>
-                    </a:solidFill>
-                  </a:tcPr>
-                </a:tc>
-              </a:tr>
-              <a:tr h="365760">
-                <a:tc>
-                  <a:txBody>
-                    <a:bodyPr/>
-                    <a:lstStyle/>
-                    <a:p>
-                      <a:r>
-                        <a:rPr sz="1200" b="0">
-                          <a:solidFill>
-                            <a:srgbClr val="101418"/>
-                          </a:solidFill>
-                          <a:latin typeface="Avenir Next"/>
-                        </a:rPr>
-                        <a:t>Payments</a:t>
-                      </a:r>
-                    </a:p>
-                  </a:txBody>
-                  <a:tcPr>
-                    <a:solidFill>
-                      <a:srgbClr val="F6F4EE"/>
-                    </a:solidFill>
-                  </a:tcPr>
-                </a:tc>
-                <a:tc>
-                  <a:txBody>
-                    <a:bodyPr/>
-                    <a:lstStyle/>
-                    <a:p>
-                      <a:r>
-                        <a:rPr sz="1200" b="0">
-                          <a:solidFill>
-                            <a:srgbClr val="101418"/>
-                          </a:solidFill>
-                          <a:latin typeface="Avenir Next"/>
-                        </a:rPr>
-                        <a:t>Stripe</a:t>
-                      </a:r>
-                    </a:p>
-                  </a:txBody>
-                  <a:tcPr>
-                    <a:solidFill>
-                      <a:srgbClr val="F6F4EE"/>
-                    </a:solidFill>
-                  </a:tcPr>
-                </a:tc>
-                <a:tc>
-                  <a:txBody>
-                    <a:bodyPr/>
-                    <a:lstStyle/>
-                    <a:p>
-                      <a:r>
-                        <a:rPr sz="1200" b="0">
-                          <a:solidFill>
-                            <a:srgbClr val="101418"/>
-                          </a:solidFill>
-                          <a:latin typeface="Avenir Next"/>
-                        </a:rPr>
-                        <a:t>Tap / Moyasar, mada, Tabby/Tamara awareness</a:t>
-                      </a:r>
-                    </a:p>
-                  </a:txBody>
-                  <a:tcPr>
-                    <a:solidFill>
-                      <a:srgbClr val="F6F4EE"/>
                     </a:solidFill>
                   </a:tcPr>
                 </a:tc>
@@ -67120,7 +66678,7 @@
                 </a:solidFill>
                 <a:latin typeface="Avenir Next"/>
               </a:rPr>
-              <a:t>•  Salla + Zid app stores — “Noor for Salla”, 30 days free for installs.</a:t>
+              <a:t>•  Salla + Zid app stores — “Noor for Salla”.</a:t>
             </a:r>
           </a:p>
           <a:p>

--- a/docs/Nashr_Pitch_Deck.pptx
+++ b/docs/Nashr_Pitch_Deck.pptx
@@ -3143,7 +3143,7 @@
                 </a:solidFill>
                 <a:latin typeface="Avenir Next"/>
               </a:rPr>
-              <a:t>نشر  ·  Nashr</a:t>
+              <a:t>ذكين  ·  Thakeen</a:t>
             </a:r>
           </a:p>
         </p:txBody>
@@ -11336,9 +11336,48 @@
           </a:p>
         </p:txBody>
       </p:sp>
+      <p:sp>
+        <p:nvSpPr>
+          <p:cNvPr id="97" name="TextBox 96"/>
+          <p:cNvSpPr txBox="1"/>
+          <p:nvPr/>
+        </p:nvSpPr>
+        <p:spPr>
+          <a:xfrm>
+            <a:off x="6430975" y="457200"/>
+            <a:ext cx="5029200" cy="365760"/>
+          </a:xfrm>
+          <a:prstGeom prst="rect">
+            <a:avLst/>
+          </a:prstGeom>
+          <a:noFill/>
+        </p:spPr>
+        <p:txBody>
+          <a:bodyPr wrap="square">
+            <a:spAutoFit/>
+          </a:bodyPr>
+          <a:lstStyle/>
+          <a:p>
+            <a:pPr algn="r">
+              <a:spcAft>
+                <a:spcPts val="600"/>
+              </a:spcAft>
+            </a:pPr>
+            <a:r>
+              <a:rPr sz="1100" b="1">
+                <a:solidFill>
+                  <a:srgbClr val="D9503F"/>
+                </a:solidFill>
+                <a:latin typeface="Avenir Next"/>
+              </a:rPr>
+              <a:t>TO VERIFY: figures not yet checked against a source</a:t>
+            </a:r>
+          </a:p>
+        </p:txBody>
+      </p:sp>
       <p:graphicFrame>
         <p:nvGraphicFramePr>
-          <p:cNvPr id="97" name="Table 96"/>
+          <p:cNvPr id="98" name="Table 97"/>
           <p:cNvGraphicFramePr>
             <a:graphicFrameLocks noGrp="1"/>
           </p:cNvGraphicFramePr>
@@ -12039,7 +12078,7 @@
       </p:graphicFrame>
       <p:sp>
         <p:nvSpPr>
-          <p:cNvPr id="98" name="TextBox 97"/>
+          <p:cNvPr id="99" name="TextBox 98"/>
           <p:cNvSpPr txBox="1"/>
           <p:nvPr/>
         </p:nvSpPr>
@@ -16302,7 +16341,7 @@
                           </a:solidFill>
                           <a:latin typeface="Avenir Next"/>
                         </a:rPr>
-                        <a:t>Nashr</a:t>
+                        <a:t>Thakeen</a:t>
                       </a:r>
                     </a:p>
                   </a:txBody>
@@ -20932,9 +20971,48 @@
           </a:p>
         </p:txBody>
       </p:sp>
+      <p:sp>
+        <p:nvSpPr>
+          <p:cNvPr id="97" name="TextBox 96"/>
+          <p:cNvSpPr txBox="1"/>
+          <p:nvPr/>
+        </p:nvSpPr>
+        <p:spPr>
+          <a:xfrm>
+            <a:off x="6430975" y="457200"/>
+            <a:ext cx="5029200" cy="365760"/>
+          </a:xfrm>
+          <a:prstGeom prst="rect">
+            <a:avLst/>
+          </a:prstGeom>
+          <a:noFill/>
+        </p:spPr>
+        <p:txBody>
+          <a:bodyPr wrap="square">
+            <a:spAutoFit/>
+          </a:bodyPr>
+          <a:lstStyle/>
+          <a:p>
+            <a:pPr algn="r">
+              <a:spcAft>
+                <a:spcPts val="600"/>
+              </a:spcAft>
+            </a:pPr>
+            <a:r>
+              <a:rPr sz="1100" b="1">
+                <a:solidFill>
+                  <a:srgbClr val="D9503F"/>
+                </a:solidFill>
+                <a:latin typeface="Avenir Next"/>
+              </a:rPr>
+              <a:t>TO VERIFY: figures not yet checked against a source</a:t>
+            </a:r>
+          </a:p>
+        </p:txBody>
+      </p:sp>
       <p:graphicFrame>
         <p:nvGraphicFramePr>
-          <p:cNvPr id="97" name="Table 96"/>
+          <p:cNvPr id="98" name="Table 97"/>
           <p:cNvGraphicFramePr>
             <a:graphicFrameLocks noGrp="1"/>
           </p:cNvGraphicFramePr>
@@ -21502,7 +21580,7 @@
       </p:graphicFrame>
       <p:sp>
         <p:nvSpPr>
-          <p:cNvPr id="98" name="Rounded Rectangle 97"/>
+          <p:cNvPr id="99" name="Rounded Rectangle 98"/>
           <p:cNvSpPr/>
           <p:nvPr/>
         </p:nvSpPr>
@@ -21545,7 +21623,7 @@
       </p:sp>
       <p:sp>
         <p:nvSpPr>
-          <p:cNvPr id="99" name="TextBox 98"/>
+          <p:cNvPr id="100" name="TextBox 99"/>
           <p:cNvSpPr txBox="1"/>
           <p:nvPr/>
         </p:nvSpPr>
@@ -21584,7 +21662,7 @@
       </p:sp>
       <p:sp>
         <p:nvSpPr>
-          <p:cNvPr id="100" name="TextBox 99"/>
+          <p:cNvPr id="101" name="TextBox 100"/>
           <p:cNvSpPr txBox="1"/>
           <p:nvPr/>
         </p:nvSpPr>
@@ -21687,7 +21765,7 @@
       </p:sp>
       <p:sp>
         <p:nvSpPr>
-          <p:cNvPr id="101" name="TextBox 100"/>
+          <p:cNvPr id="102" name="TextBox 101"/>
           <p:cNvSpPr txBox="1"/>
           <p:nvPr/>
         </p:nvSpPr>
@@ -21719,7 +21797,7 @@
                 </a:solidFill>
                 <a:latin typeface="Avenir Next"/>
               </a:rPr>
-              <a:t>Full 36-month model with live assumptions: Nashr_Financial_Model.xlsx. Figures above are indicative outputs of the base case; verify in the workbook.</a:t>
+              <a:t>Full 36-month model with live assumptions in the financial model workbook (docs/Nashr_Financial_Model.xlsx). Figures above are indicative outputs of the base case; verify in the workbook.</a:t>
             </a:r>
           </a:p>
         </p:txBody>
@@ -30609,6 +30687,45 @@
         </p:nvSpPr>
         <p:spPr>
           <a:xfrm>
+            <a:off x="6430975" y="457200"/>
+            <a:ext cx="5029200" cy="365760"/>
+          </a:xfrm>
+          <a:prstGeom prst="rect">
+            <a:avLst/>
+          </a:prstGeom>
+          <a:noFill/>
+        </p:spPr>
+        <p:txBody>
+          <a:bodyPr wrap="square">
+            <a:spAutoFit/>
+          </a:bodyPr>
+          <a:lstStyle/>
+          <a:p>
+            <a:pPr algn="r">
+              <a:spcAft>
+                <a:spcPts val="600"/>
+              </a:spcAft>
+            </a:pPr>
+            <a:r>
+              <a:rPr sz="1100" b="1">
+                <a:solidFill>
+                  <a:srgbClr val="D9503F"/>
+                </a:solidFill>
+                <a:latin typeface="Avenir Next"/>
+              </a:rPr>
+              <a:t>TO VERIFY: figures not yet checked against a source</a:t>
+            </a:r>
+          </a:p>
+        </p:txBody>
+      </p:sp>
+      <p:sp>
+        <p:nvSpPr>
+          <p:cNvPr id="98" name="TextBox 97"/>
+          <p:cNvSpPr txBox="1"/>
+          <p:nvPr/>
+        </p:nvSpPr>
+        <p:spPr>
+          <a:xfrm>
             <a:off x="731520" y="2103120"/>
             <a:ext cx="5486400" cy="1097280"/>
           </a:xfrm>
@@ -30642,7 +30759,7 @@
       </p:sp>
       <p:sp>
         <p:nvSpPr>
-          <p:cNvPr id="98" name="TextBox 97"/>
+          <p:cNvPr id="99" name="TextBox 98"/>
           <p:cNvSpPr txBox="1"/>
           <p:nvPr/>
         </p:nvSpPr>
@@ -30681,7 +30798,7 @@
       </p:sp>
       <p:graphicFrame>
         <p:nvGraphicFramePr>
-          <p:cNvPr id="99" name="Table 98"/>
+          <p:cNvPr id="100" name="Table 99"/>
           <p:cNvGraphicFramePr>
             <a:graphicFrameLocks noGrp="1"/>
           </p:cNvGraphicFramePr>
@@ -30937,7 +31054,7 @@
       </p:graphicFrame>
       <p:sp>
         <p:nvSpPr>
-          <p:cNvPr id="100" name="TextBox 99"/>
+          <p:cNvPr id="101" name="TextBox 100"/>
           <p:cNvSpPr txBox="1"/>
           <p:nvPr/>
         </p:nvSpPr>
@@ -30992,7 +31109,7 @@
       </p:sp>
       <p:sp>
         <p:nvSpPr>
-          <p:cNvPr id="101" name="TextBox 100"/>
+          <p:cNvPr id="102" name="TextBox 101"/>
           <p:cNvSpPr txBox="1"/>
           <p:nvPr/>
         </p:nvSpPr>
@@ -35231,6 +35348,45 @@
           </a:p>
         </p:txBody>
       </p:sp>
+      <p:sp>
+        <p:nvSpPr>
+          <p:cNvPr id="98" name="TextBox 97"/>
+          <p:cNvSpPr txBox="1"/>
+          <p:nvPr/>
+        </p:nvSpPr>
+        <p:spPr>
+          <a:xfrm>
+            <a:off x="6430975" y="457200"/>
+            <a:ext cx="5029200" cy="365760"/>
+          </a:xfrm>
+          <a:prstGeom prst="rect">
+            <a:avLst/>
+          </a:prstGeom>
+          <a:noFill/>
+        </p:spPr>
+        <p:txBody>
+          <a:bodyPr wrap="square">
+            <a:spAutoFit/>
+          </a:bodyPr>
+          <a:lstStyle/>
+          <a:p>
+            <a:pPr algn="r">
+              <a:spcAft>
+                <a:spcPts val="600"/>
+              </a:spcAft>
+            </a:pPr>
+            <a:r>
+              <a:rPr sz="1100" b="1">
+                <a:solidFill>
+                  <a:srgbClr val="D9503F"/>
+                </a:solidFill>
+                <a:latin typeface="Avenir Next"/>
+              </a:rPr>
+              <a:t>TO VERIFY: figures not yet checked against a source</a:t>
+            </a:r>
+          </a:p>
+        </p:txBody>
+      </p:sp>
     </p:spTree>
   </p:cSld>
   <p:clrMapOvr>
@@ -39446,7 +39602,7 @@
                 </a:solidFill>
                 <a:latin typeface="Avenir Next"/>
               </a:rPr>
-              <a:t>Salla · Zid · Shopify · Snap · TikTok · Meta · Google · WhatsApp — one-click OAuth.</a:t>
+              <a:t>Salla · Zid · Shopify · Snap · TikTok · Meta · Google · WhatsApp — connectors built, each switched on once its platform keys and approvals are in place.</a:t>
             </a:r>
           </a:p>
         </p:txBody>
@@ -39930,7 +40086,7 @@
                 </a:solidFill>
                 <a:latin typeface="Avenir Next"/>
               </a:rPr>
-              <a:t>08:00 WhatsApp brief: revenue, ROAS, what she did, what needs a yes.</a:t>
+              <a:t>08:00 morning brief in the app (and by email): what waits for your approval, credits, seasons ahead.</a:t>
             </a:r>
           </a:p>
         </p:txBody>
@@ -48547,6 +48703,45 @@
         </p:nvSpPr>
         <p:spPr>
           <a:xfrm>
+            <a:off x="6430975" y="457200"/>
+            <a:ext cx="5029200" cy="365760"/>
+          </a:xfrm>
+          <a:prstGeom prst="rect">
+            <a:avLst/>
+          </a:prstGeom>
+          <a:noFill/>
+        </p:spPr>
+        <p:txBody>
+          <a:bodyPr wrap="square">
+            <a:spAutoFit/>
+          </a:bodyPr>
+          <a:lstStyle/>
+          <a:p>
+            <a:pPr algn="r">
+              <a:spcAft>
+                <a:spcPts val="600"/>
+              </a:spcAft>
+            </a:pPr>
+            <a:r>
+              <a:rPr sz="1100" b="1">
+                <a:solidFill>
+                  <a:srgbClr val="D9503F"/>
+                </a:solidFill>
+                <a:latin typeface="Avenir Next"/>
+              </a:rPr>
+              <a:t>TO VERIFY: figures not yet checked against a source</a:t>
+            </a:r>
+          </a:p>
+        </p:txBody>
+      </p:sp>
+      <p:sp>
+        <p:nvSpPr>
+          <p:cNvPr id="98" name="TextBox 97"/>
+          <p:cNvSpPr txBox="1"/>
+          <p:nvPr/>
+        </p:nvSpPr>
+        <p:spPr>
+          <a:xfrm>
             <a:off x="731520" y="2286000"/>
             <a:ext cx="2651760" cy="822960"/>
           </a:xfrm>
@@ -48580,7 +48775,7 @@
       </p:sp>
       <p:sp>
         <p:nvSpPr>
-          <p:cNvPr id="98" name="TextBox 97"/>
+          <p:cNvPr id="99" name="TextBox 98"/>
           <p:cNvSpPr txBox="1"/>
           <p:nvPr/>
         </p:nvSpPr>
@@ -48619,7 +48814,7 @@
       </p:sp>
       <p:sp>
         <p:nvSpPr>
-          <p:cNvPr id="99" name="TextBox 98"/>
+          <p:cNvPr id="100" name="TextBox 99"/>
           <p:cNvSpPr txBox="1"/>
           <p:nvPr/>
         </p:nvSpPr>
@@ -48658,7 +48853,7 @@
       </p:sp>
       <p:sp>
         <p:nvSpPr>
-          <p:cNvPr id="100" name="TextBox 99"/>
+          <p:cNvPr id="101" name="TextBox 100"/>
           <p:cNvSpPr txBox="1"/>
           <p:nvPr/>
         </p:nvSpPr>
@@ -48697,7 +48892,7 @@
       </p:sp>
       <p:sp>
         <p:nvSpPr>
-          <p:cNvPr id="101" name="TextBox 100"/>
+          <p:cNvPr id="102" name="TextBox 101"/>
           <p:cNvSpPr txBox="1"/>
           <p:nvPr/>
         </p:nvSpPr>
@@ -48736,7 +48931,7 @@
       </p:sp>
       <p:sp>
         <p:nvSpPr>
-          <p:cNvPr id="102" name="TextBox 101"/>
+          <p:cNvPr id="103" name="TextBox 102"/>
           <p:cNvSpPr txBox="1"/>
           <p:nvPr/>
         </p:nvSpPr>
@@ -48775,7 +48970,7 @@
       </p:sp>
       <p:sp>
         <p:nvSpPr>
-          <p:cNvPr id="103" name="TextBox 102"/>
+          <p:cNvPr id="104" name="TextBox 103"/>
           <p:cNvSpPr txBox="1"/>
           <p:nvPr/>
         </p:nvSpPr>
@@ -52919,6 +53114,45 @@
         </p:nvSpPr>
         <p:spPr>
           <a:xfrm>
+            <a:off x="6430975" y="457200"/>
+            <a:ext cx="5029200" cy="365760"/>
+          </a:xfrm>
+          <a:prstGeom prst="rect">
+            <a:avLst/>
+          </a:prstGeom>
+          <a:noFill/>
+        </p:spPr>
+        <p:txBody>
+          <a:bodyPr wrap="square">
+            <a:spAutoFit/>
+          </a:bodyPr>
+          <a:lstStyle/>
+          <a:p>
+            <a:pPr algn="r">
+              <a:spcAft>
+                <a:spcPts val="600"/>
+              </a:spcAft>
+            </a:pPr>
+            <a:r>
+              <a:rPr sz="1100" b="1">
+                <a:solidFill>
+                  <a:srgbClr val="D9503F"/>
+                </a:solidFill>
+                <a:latin typeface="Avenir Next"/>
+              </a:rPr>
+              <a:t>TO VERIFY: figures not yet checked against a source</a:t>
+            </a:r>
+          </a:p>
+        </p:txBody>
+      </p:sp>
+      <p:sp>
+        <p:nvSpPr>
+          <p:cNvPr id="98" name="TextBox 97"/>
+          <p:cNvSpPr txBox="1"/>
+          <p:nvPr/>
+        </p:nvSpPr>
+        <p:spPr>
+          <a:xfrm>
             <a:off x="731520" y="2194560"/>
             <a:ext cx="2651760" cy="822960"/>
           </a:xfrm>
@@ -52952,7 +53186,7 @@
       </p:sp>
       <p:sp>
         <p:nvSpPr>
-          <p:cNvPr id="98" name="TextBox 97"/>
+          <p:cNvPr id="99" name="TextBox 98"/>
           <p:cNvSpPr txBox="1"/>
           <p:nvPr/>
         </p:nvSpPr>
@@ -52991,7 +53225,7 @@
       </p:sp>
       <p:sp>
         <p:nvSpPr>
-          <p:cNvPr id="99" name="TextBox 98"/>
+          <p:cNvPr id="100" name="TextBox 99"/>
           <p:cNvSpPr txBox="1"/>
           <p:nvPr/>
         </p:nvSpPr>
@@ -53030,7 +53264,7 @@
       </p:sp>
       <p:sp>
         <p:nvSpPr>
-          <p:cNvPr id="100" name="TextBox 99"/>
+          <p:cNvPr id="101" name="TextBox 100"/>
           <p:cNvSpPr txBox="1"/>
           <p:nvPr/>
         </p:nvSpPr>
@@ -53069,7 +53303,7 @@
       </p:sp>
       <p:sp>
         <p:nvSpPr>
-          <p:cNvPr id="101" name="TextBox 100"/>
+          <p:cNvPr id="102" name="TextBox 101"/>
           <p:cNvSpPr txBox="1"/>
           <p:nvPr/>
         </p:nvSpPr>
@@ -53108,7 +53342,7 @@
       </p:sp>
       <p:sp>
         <p:nvSpPr>
-          <p:cNvPr id="102" name="TextBox 101"/>
+          <p:cNvPr id="103" name="TextBox 102"/>
           <p:cNvSpPr txBox="1"/>
           <p:nvPr/>
         </p:nvSpPr>
@@ -53147,7 +53381,7 @@
       </p:sp>
       <p:sp>
         <p:nvSpPr>
-          <p:cNvPr id="103" name="TextBox 102"/>
+          <p:cNvPr id="104" name="TextBox 103"/>
           <p:cNvSpPr txBox="1"/>
           <p:nvPr/>
         </p:nvSpPr>
@@ -62122,7 +62356,7 @@
                           </a:solidFill>
                           <a:latin typeface="Avenir Next"/>
                         </a:rPr>
-                        <a:t>Nashr (Noor)</a:t>
+                        <a:t>Thakeen (Noor)</a:t>
                       </a:r>
                     </a:p>
                   </a:txBody>
@@ -62530,7 +62764,7 @@
                           </a:solidFill>
                           <a:latin typeface="Avenir Next"/>
                         </a:rPr>
-                        <a:t>Tap / Moyasar, mada, Tabby/Tamara awareness</a:t>
+                        <a:t>Paymob, mada, Tabby/Tamara awareness</a:t>
                       </a:r>
                     </a:p>
                   </a:txBody>
@@ -66726,7 +66960,7 @@
                 </a:solidFill>
                 <a:latin typeface="Avenir Next"/>
               </a:rPr>
-              <a:t>•  Partnerships: Tap/Moyasar merchant base, Monsha'at programs, Snap KSA partner team, TikTok Shop MENA.</a:t>
+              <a:t>•  Partnerships: Paymob merchant base, Monsha'at programs, Snap KSA partner team, TikTok Shop MENA.</a:t>
             </a:r>
           </a:p>
           <a:p>
@@ -66863,7 +67097,7 @@
                 </a:solidFill>
                 <a:latin typeface="Avenir Next"/>
               </a:rPr>
-              <a:t>•  Now: waitlist live (nashr site, AR/EN)</a:t>
+              <a:t>•  Now: live at thakeen.com (AR/EN), onboarding founding customers</a:t>
             </a:r>
           </a:p>
           <a:p>
